--- a/22_September_Tuesday/03_morning_sources_detectors/Sources_Monitors/McStas_McXtrace_Sources_and_Monitors.pptx
+++ b/22_September_Tuesday/03_morning_sources_detectors/Sources_Monitors/McStas_McXtrace_Sources_and_Monitors.pptx
@@ -6435,7 +6435,7 @@
             </a:ln>
             <a:extLst>
               <a:ext uri="{C572A759-6A51-4108-AA02-DFA0A04FC94B}">
-                <ma14:wrappingTextBoxFlag xmlns:ma14="http://schemas.microsoft.com/office/mac/drawingml/2011/main" xmlns:a14="http://schemas.microsoft.com/office/drawing/2010/main" xmlns:m="http://schemas.openxmlformats.org/officeDocument/2006/math" xmlns="" val="1"/>
+                <ma14:wrappingTextBoxFlag xmlns="" xmlns:m="http://schemas.openxmlformats.org/officeDocument/2006/math" xmlns:a14="http://schemas.microsoft.com/office/drawing/2010/main" xmlns:ma14="http://schemas.microsoft.com/office/mac/drawingml/2011/main" val="1"/>
               </a:ext>
             </a:extLst>
           </p:spPr>
@@ -6826,7 +6826,7 @@
             </a:ln>
             <a:extLst>
               <a:ext uri="{C572A759-6A51-4108-AA02-DFA0A04FC94B}">
-                <ma14:wrappingTextBoxFlag xmlns:ma14="http://schemas.microsoft.com/office/mac/drawingml/2011/main" xmlns:a14="http://schemas.microsoft.com/office/drawing/2010/main" xmlns:m="http://schemas.openxmlformats.org/officeDocument/2006/math" xmlns="" val="1"/>
+                <ma14:wrappingTextBoxFlag xmlns="" xmlns:m="http://schemas.openxmlformats.org/officeDocument/2006/math" xmlns:a14="http://schemas.microsoft.com/office/drawing/2010/main" xmlns:ma14="http://schemas.microsoft.com/office/mac/drawingml/2011/main" val="1"/>
               </a:ext>
             </a:extLst>
           </p:spPr>
@@ -6875,7 +6875,7 @@
             </a:ln>
             <a:extLst>
               <a:ext uri="{C572A759-6A51-4108-AA02-DFA0A04FC94B}">
-                <ma14:wrappingTextBoxFlag xmlns:ma14="http://schemas.microsoft.com/office/mac/drawingml/2011/main" xmlns:a14="http://schemas.microsoft.com/office/drawing/2010/main" xmlns:m="http://schemas.openxmlformats.org/officeDocument/2006/math" xmlns="" val="1"/>
+                <ma14:wrappingTextBoxFlag xmlns="" xmlns:m="http://schemas.openxmlformats.org/officeDocument/2006/math" xmlns:a14="http://schemas.microsoft.com/office/drawing/2010/main" xmlns:ma14="http://schemas.microsoft.com/office/mac/drawingml/2011/main" val="1"/>
               </a:ext>
             </a:extLst>
           </p:spPr>
@@ -7001,7 +7001,7 @@
             </a:ln>
             <a:extLst>
               <a:ext uri="{C572A759-6A51-4108-AA02-DFA0A04FC94B}">
-                <ma14:wrappingTextBoxFlag xmlns:ma14="http://schemas.microsoft.com/office/mac/drawingml/2011/main" xmlns:a14="http://schemas.microsoft.com/office/drawing/2010/main" xmlns:m="http://schemas.openxmlformats.org/officeDocument/2006/math" xmlns="" val="1"/>
+                <ma14:wrappingTextBoxFlag xmlns="" xmlns:m="http://schemas.openxmlformats.org/officeDocument/2006/math" xmlns:a14="http://schemas.microsoft.com/office/drawing/2010/main" xmlns:ma14="http://schemas.microsoft.com/office/mac/drawingml/2011/main" val="1"/>
               </a:ext>
             </a:extLst>
           </p:spPr>
@@ -7101,7 +7101,7 @@
             </a:ln>
             <a:extLst>
               <a:ext uri="{C572A759-6A51-4108-AA02-DFA0A04FC94B}">
-                <ma14:wrappingTextBoxFlag xmlns:ma14="http://schemas.microsoft.com/office/mac/drawingml/2011/main" xmlns:a14="http://schemas.microsoft.com/office/drawing/2010/main" xmlns:m="http://schemas.openxmlformats.org/officeDocument/2006/math" xmlns="" val="1"/>
+                <ma14:wrappingTextBoxFlag xmlns="" xmlns:m="http://schemas.openxmlformats.org/officeDocument/2006/math" xmlns:a14="http://schemas.microsoft.com/office/drawing/2010/main" xmlns:ma14="http://schemas.microsoft.com/office/mac/drawingml/2011/main" val="1"/>
               </a:ext>
             </a:extLst>
           </p:spPr>
@@ -7150,7 +7150,7 @@
             </a:ln>
             <a:extLst>
               <a:ext uri="{C572A759-6A51-4108-AA02-DFA0A04FC94B}">
-                <ma14:wrappingTextBoxFlag xmlns:ma14="http://schemas.microsoft.com/office/mac/drawingml/2011/main" xmlns:a14="http://schemas.microsoft.com/office/drawing/2010/main" xmlns:m="http://schemas.openxmlformats.org/officeDocument/2006/math" xmlns="" val="1"/>
+                <ma14:wrappingTextBoxFlag xmlns="" xmlns:m="http://schemas.openxmlformats.org/officeDocument/2006/math" xmlns:a14="http://schemas.microsoft.com/office/drawing/2010/main" xmlns:ma14="http://schemas.microsoft.com/office/mac/drawingml/2011/main" val="1"/>
               </a:ext>
             </a:extLst>
           </p:spPr>
@@ -7199,7 +7199,7 @@
             </a:ln>
             <a:extLst>
               <a:ext uri="{C572A759-6A51-4108-AA02-DFA0A04FC94B}">
-                <ma14:wrappingTextBoxFlag xmlns:ma14="http://schemas.microsoft.com/office/mac/drawingml/2011/main" xmlns:a14="http://schemas.microsoft.com/office/drawing/2010/main" xmlns:m="http://schemas.openxmlformats.org/officeDocument/2006/math" xmlns="" val="1"/>
+                <ma14:wrappingTextBoxFlag xmlns="" xmlns:m="http://schemas.openxmlformats.org/officeDocument/2006/math" xmlns:a14="http://schemas.microsoft.com/office/drawing/2010/main" xmlns:ma14="http://schemas.microsoft.com/office/mac/drawingml/2011/main" val="1"/>
               </a:ext>
             </a:extLst>
           </p:spPr>
@@ -7248,7 +7248,7 @@
             </a:ln>
             <a:extLst>
               <a:ext uri="{C572A759-6A51-4108-AA02-DFA0A04FC94B}">
-                <ma14:wrappingTextBoxFlag xmlns:ma14="http://schemas.microsoft.com/office/mac/drawingml/2011/main" xmlns:a14="http://schemas.microsoft.com/office/drawing/2010/main" xmlns:m="http://schemas.openxmlformats.org/officeDocument/2006/math" xmlns="" val="1"/>
+                <ma14:wrappingTextBoxFlag xmlns="" xmlns:m="http://schemas.openxmlformats.org/officeDocument/2006/math" xmlns:a14="http://schemas.microsoft.com/office/drawing/2010/main" xmlns:ma14="http://schemas.microsoft.com/office/mac/drawingml/2011/main" val="1"/>
               </a:ext>
             </a:extLst>
           </p:spPr>
@@ -7297,7 +7297,7 @@
             </a:ln>
             <a:extLst>
               <a:ext uri="{C572A759-6A51-4108-AA02-DFA0A04FC94B}">
-                <ma14:wrappingTextBoxFlag xmlns:ma14="http://schemas.microsoft.com/office/mac/drawingml/2011/main" xmlns:a14="http://schemas.microsoft.com/office/drawing/2010/main" xmlns:m="http://schemas.openxmlformats.org/officeDocument/2006/math" xmlns="" val="1"/>
+                <ma14:wrappingTextBoxFlag xmlns="" xmlns:m="http://schemas.openxmlformats.org/officeDocument/2006/math" xmlns:a14="http://schemas.microsoft.com/office/drawing/2010/main" xmlns:ma14="http://schemas.microsoft.com/office/mac/drawingml/2011/main" val="1"/>
               </a:ext>
             </a:extLst>
           </p:spPr>
@@ -8189,7 +8189,7 @@
             </a:ln>
             <a:extLst>
               <a:ext uri="{C572A759-6A51-4108-AA02-DFA0A04FC94B}">
-                <ma14:wrappingTextBoxFlag xmlns:ma14="http://schemas.microsoft.com/office/mac/drawingml/2011/main" xmlns:a14="http://schemas.microsoft.com/office/drawing/2010/main" xmlns:m="http://schemas.openxmlformats.org/officeDocument/2006/math" xmlns="" val="1"/>
+                <ma14:wrappingTextBoxFlag xmlns="" xmlns:m="http://schemas.openxmlformats.org/officeDocument/2006/math" xmlns:a14="http://schemas.microsoft.com/office/drawing/2010/main" xmlns:ma14="http://schemas.microsoft.com/office/mac/drawingml/2011/main" val="1"/>
               </a:ext>
             </a:extLst>
           </p:spPr>
@@ -8246,7 +8246,7 @@
             </a:ln>
             <a:extLst>
               <a:ext uri="{C572A759-6A51-4108-AA02-DFA0A04FC94B}">
-                <ma14:wrappingTextBoxFlag xmlns:ma14="http://schemas.microsoft.com/office/mac/drawingml/2011/main" xmlns:a14="http://schemas.microsoft.com/office/drawing/2010/main" xmlns:m="http://schemas.openxmlformats.org/officeDocument/2006/math" xmlns="" val="1"/>
+                <ma14:wrappingTextBoxFlag xmlns="" xmlns:m="http://schemas.openxmlformats.org/officeDocument/2006/math" xmlns:a14="http://schemas.microsoft.com/office/drawing/2010/main" xmlns:ma14="http://schemas.microsoft.com/office/mac/drawingml/2011/main" val="1"/>
               </a:ext>
             </a:extLst>
           </p:spPr>
@@ -9619,6 +9619,189 @@
           </a:p>
         </p:txBody>
       </p:sp>
+      <p:grpSp>
+        <p:nvGrpSpPr>
+          <p:cNvPr id="13" name="Group 12">
+            <a:extLst>
+              <a:ext uri="{FF2B5EF4-FFF2-40B4-BE49-F238E27FC236}">
+                <a16:creationId xmlns:a16="http://schemas.microsoft.com/office/drawing/2014/main" id="{B94E00FF-6F2D-78EA-55F3-5DBCBC12CD0C}"/>
+              </a:ext>
+            </a:extLst>
+          </p:cNvPr>
+          <p:cNvGrpSpPr/>
+          <p:nvPr/>
+        </p:nvGrpSpPr>
+        <p:grpSpPr>
+          <a:xfrm>
+            <a:off x="8424360" y="119520"/>
+            <a:ext cx="1590840" cy="748800"/>
+            <a:chOff x="8424360" y="119520"/>
+            <a:chExt cx="1590840" cy="748800"/>
+          </a:xfrm>
+        </p:grpSpPr>
+        <p:grpSp>
+          <p:nvGrpSpPr>
+            <p:cNvPr id="14" name="Group 13">
+              <a:extLst>
+                <a:ext uri="{FF2B5EF4-FFF2-40B4-BE49-F238E27FC236}">
+                  <a16:creationId xmlns:a16="http://schemas.microsoft.com/office/drawing/2014/main" id="{9B870F47-4139-55B7-059E-3457DDAB828B}"/>
+                </a:ext>
+              </a:extLst>
+            </p:cNvPr>
+            <p:cNvGrpSpPr/>
+            <p:nvPr/>
+          </p:nvGrpSpPr>
+          <p:grpSpPr>
+            <a:xfrm>
+              <a:off x="9225000" y="124302"/>
+              <a:ext cx="790200" cy="708378"/>
+              <a:chOff x="9225000" y="124302"/>
+              <a:chExt cx="790200" cy="708378"/>
+            </a:xfrm>
+          </p:grpSpPr>
+          <p:pic>
+            <p:nvPicPr>
+              <p:cNvPr id="16" name="Picture 15">
+                <a:extLst>
+                  <a:ext uri="{FF2B5EF4-FFF2-40B4-BE49-F238E27FC236}">
+                    <a16:creationId xmlns:a16="http://schemas.microsoft.com/office/drawing/2014/main" id="{1308F84C-F65C-2FD2-35AE-096450E84197}"/>
+                  </a:ext>
+                </a:extLst>
+              </p:cNvPr>
+              <p:cNvPicPr>
+                <a:picLocks noChangeAspect="1"/>
+              </p:cNvPicPr>
+              <p:nvPr/>
+            </p:nvPicPr>
+            <p:blipFill>
+              <a:blip r:embed="rId4"/>
+              <a:stretch>
+                <a:fillRect/>
+              </a:stretch>
+            </p:blipFill>
+            <p:spPr>
+              <a:xfrm>
+                <a:off x="9262056" y="124302"/>
+                <a:ext cx="716666" cy="424533"/>
+              </a:xfrm>
+              <a:prstGeom prst="rect">
+                <a:avLst/>
+              </a:prstGeom>
+            </p:spPr>
+          </p:pic>
+          <p:grpSp>
+            <p:nvGrpSpPr>
+              <p:cNvPr id="17" name="Group 32">
+                <a:extLst>
+                  <a:ext uri="{FF2B5EF4-FFF2-40B4-BE49-F238E27FC236}">
+                    <a16:creationId xmlns:a16="http://schemas.microsoft.com/office/drawing/2014/main" id="{FCD984BC-F6BE-E575-B4D8-D7DAA938EC9F}"/>
+                  </a:ext>
+                </a:extLst>
+              </p:cNvPr>
+              <p:cNvGrpSpPr/>
+              <p:nvPr/>
+            </p:nvGrpSpPr>
+            <p:grpSpPr>
+              <a:xfrm>
+                <a:off x="9225000" y="531360"/>
+                <a:ext cx="790200" cy="301320"/>
+                <a:chOff x="9225000" y="531360"/>
+                <a:chExt cx="790200" cy="301320"/>
+              </a:xfrm>
+            </p:grpSpPr>
+            <p:pic>
+              <p:nvPicPr>
+                <p:cNvPr id="18" name="Picture 29" descr="Synchrotron SOLEIL">
+                  <a:extLst>
+                    <a:ext uri="{FF2B5EF4-FFF2-40B4-BE49-F238E27FC236}">
+                      <a16:creationId xmlns:a16="http://schemas.microsoft.com/office/drawing/2014/main" id="{1DD8802C-ACC0-8B6D-D789-4EF9686A6635}"/>
+                    </a:ext>
+                  </a:extLst>
+                </p:cNvPr>
+                <p:cNvPicPr/>
+                <p:nvPr/>
+              </p:nvPicPr>
+              <p:blipFill>
+                <a:blip r:embed="rId5"/>
+                <a:stretch/>
+              </p:blipFill>
+              <p:spPr>
+                <a:xfrm>
+                  <a:off x="9225000" y="531360"/>
+                  <a:ext cx="547920" cy="264600"/>
+                </a:xfrm>
+                <a:prstGeom prst="rect">
+                  <a:avLst/>
+                </a:prstGeom>
+                <a:noFill/>
+                <a:ln w="0">
+                  <a:noFill/>
+                </a:ln>
+              </p:spPr>
+            </p:pic>
+            <p:pic>
+              <p:nvPicPr>
+                <p:cNvPr id="19" name="Picture 30" descr="DTU Physics">
+                  <a:extLst>
+                    <a:ext uri="{FF2B5EF4-FFF2-40B4-BE49-F238E27FC236}">
+                      <a16:creationId xmlns:a16="http://schemas.microsoft.com/office/drawing/2014/main" id="{1AF11DEE-6DF3-3B26-279E-763D42A322AD}"/>
+                    </a:ext>
+                  </a:extLst>
+                </p:cNvPr>
+                <p:cNvPicPr/>
+                <p:nvPr/>
+              </p:nvPicPr>
+              <p:blipFill>
+                <a:blip r:embed="rId6"/>
+                <a:stretch/>
+              </p:blipFill>
+              <p:spPr>
+                <a:xfrm>
+                  <a:off x="9814320" y="536400"/>
+                  <a:ext cx="200880" cy="296280"/>
+                </a:xfrm>
+                <a:prstGeom prst="rect">
+                  <a:avLst/>
+                </a:prstGeom>
+                <a:noFill/>
+                <a:ln w="0">
+                  <a:noFill/>
+                </a:ln>
+              </p:spPr>
+            </p:pic>
+          </p:grpSp>
+        </p:grpSp>
+        <p:pic>
+          <p:nvPicPr>
+            <p:cNvPr id="15" name="Picture 31">
+              <a:extLst>
+                <a:ext uri="{FF2B5EF4-FFF2-40B4-BE49-F238E27FC236}">
+                  <a16:creationId xmlns:a16="http://schemas.microsoft.com/office/drawing/2014/main" id="{8F877B52-70FE-29EF-3EED-586AEDEF4768}"/>
+                </a:ext>
+              </a:extLst>
+            </p:cNvPr>
+            <p:cNvPicPr/>
+            <p:nvPr/>
+          </p:nvPicPr>
+          <p:blipFill>
+            <a:blip r:embed="rId7"/>
+            <a:stretch/>
+          </p:blipFill>
+          <p:spPr>
+            <a:xfrm>
+              <a:off x="8424360" y="119520"/>
+              <a:ext cx="736200" cy="748800"/>
+            </a:xfrm>
+            <a:prstGeom prst="rect">
+              <a:avLst/>
+            </a:prstGeom>
+            <a:noFill/>
+            <a:ln w="0">
+              <a:noFill/>
+            </a:ln>
+          </p:spPr>
+        </p:pic>
+      </p:grpSp>
     </p:spTree>
   </p:cSld>
   <p:clrMapOvr>
@@ -11716,6 +11899,189 @@
           </a:p>
         </p:txBody>
       </p:sp>
+      <p:grpSp>
+        <p:nvGrpSpPr>
+          <p:cNvPr id="47" name="Group 46">
+            <a:extLst>
+              <a:ext uri="{FF2B5EF4-FFF2-40B4-BE49-F238E27FC236}">
+                <a16:creationId xmlns:a16="http://schemas.microsoft.com/office/drawing/2014/main" id="{5D57B675-50FE-6E21-F68A-8A666C563D8A}"/>
+              </a:ext>
+            </a:extLst>
+          </p:cNvPr>
+          <p:cNvGrpSpPr/>
+          <p:nvPr/>
+        </p:nvGrpSpPr>
+        <p:grpSpPr>
+          <a:xfrm>
+            <a:off x="8424360" y="119520"/>
+            <a:ext cx="1590840" cy="748800"/>
+            <a:chOff x="8424360" y="119520"/>
+            <a:chExt cx="1590840" cy="748800"/>
+          </a:xfrm>
+        </p:grpSpPr>
+        <p:grpSp>
+          <p:nvGrpSpPr>
+            <p:cNvPr id="48" name="Group 47">
+              <a:extLst>
+                <a:ext uri="{FF2B5EF4-FFF2-40B4-BE49-F238E27FC236}">
+                  <a16:creationId xmlns:a16="http://schemas.microsoft.com/office/drawing/2014/main" id="{488A1EC3-4085-FA54-29BF-A3E3E20FAD7F}"/>
+                </a:ext>
+              </a:extLst>
+            </p:cNvPr>
+            <p:cNvGrpSpPr/>
+            <p:nvPr/>
+          </p:nvGrpSpPr>
+          <p:grpSpPr>
+            <a:xfrm>
+              <a:off x="9225000" y="124302"/>
+              <a:ext cx="790200" cy="708378"/>
+              <a:chOff x="9225000" y="124302"/>
+              <a:chExt cx="790200" cy="708378"/>
+            </a:xfrm>
+          </p:grpSpPr>
+          <p:pic>
+            <p:nvPicPr>
+              <p:cNvPr id="50" name="Picture 49">
+                <a:extLst>
+                  <a:ext uri="{FF2B5EF4-FFF2-40B4-BE49-F238E27FC236}">
+                    <a16:creationId xmlns:a16="http://schemas.microsoft.com/office/drawing/2014/main" id="{EA02C28F-2A8F-2574-7B28-62BE24CDB0B3}"/>
+                  </a:ext>
+                </a:extLst>
+              </p:cNvPr>
+              <p:cNvPicPr>
+                <a:picLocks noChangeAspect="1"/>
+              </p:cNvPicPr>
+              <p:nvPr/>
+            </p:nvPicPr>
+            <p:blipFill>
+              <a:blip r:embed="rId4"/>
+              <a:stretch>
+                <a:fillRect/>
+              </a:stretch>
+            </p:blipFill>
+            <p:spPr>
+              <a:xfrm>
+                <a:off x="9262056" y="124302"/>
+                <a:ext cx="716666" cy="424533"/>
+              </a:xfrm>
+              <a:prstGeom prst="rect">
+                <a:avLst/>
+              </a:prstGeom>
+            </p:spPr>
+          </p:pic>
+          <p:grpSp>
+            <p:nvGrpSpPr>
+              <p:cNvPr id="51" name="Group 32">
+                <a:extLst>
+                  <a:ext uri="{FF2B5EF4-FFF2-40B4-BE49-F238E27FC236}">
+                    <a16:creationId xmlns:a16="http://schemas.microsoft.com/office/drawing/2014/main" id="{18FA0708-F96C-9694-0316-DA8889021406}"/>
+                  </a:ext>
+                </a:extLst>
+              </p:cNvPr>
+              <p:cNvGrpSpPr/>
+              <p:nvPr/>
+            </p:nvGrpSpPr>
+            <p:grpSpPr>
+              <a:xfrm>
+                <a:off x="9225000" y="531360"/>
+                <a:ext cx="790200" cy="301320"/>
+                <a:chOff x="9225000" y="531360"/>
+                <a:chExt cx="790200" cy="301320"/>
+              </a:xfrm>
+            </p:grpSpPr>
+            <p:pic>
+              <p:nvPicPr>
+                <p:cNvPr id="52" name="Picture 29" descr="Synchrotron SOLEIL">
+                  <a:extLst>
+                    <a:ext uri="{FF2B5EF4-FFF2-40B4-BE49-F238E27FC236}">
+                      <a16:creationId xmlns:a16="http://schemas.microsoft.com/office/drawing/2014/main" id="{9C90E63D-3751-2DBB-A186-212A3CEB8CE5}"/>
+                    </a:ext>
+                  </a:extLst>
+                </p:cNvPr>
+                <p:cNvPicPr/>
+                <p:nvPr/>
+              </p:nvPicPr>
+              <p:blipFill>
+                <a:blip r:embed="rId5"/>
+                <a:stretch/>
+              </p:blipFill>
+              <p:spPr>
+                <a:xfrm>
+                  <a:off x="9225000" y="531360"/>
+                  <a:ext cx="547920" cy="264600"/>
+                </a:xfrm>
+                <a:prstGeom prst="rect">
+                  <a:avLst/>
+                </a:prstGeom>
+                <a:noFill/>
+                <a:ln w="0">
+                  <a:noFill/>
+                </a:ln>
+              </p:spPr>
+            </p:pic>
+            <p:pic>
+              <p:nvPicPr>
+                <p:cNvPr id="53" name="Picture 30" descr="DTU Physics">
+                  <a:extLst>
+                    <a:ext uri="{FF2B5EF4-FFF2-40B4-BE49-F238E27FC236}">
+                      <a16:creationId xmlns:a16="http://schemas.microsoft.com/office/drawing/2014/main" id="{A6422272-CF8D-1E6A-E2E9-8711F0355944}"/>
+                    </a:ext>
+                  </a:extLst>
+                </p:cNvPr>
+                <p:cNvPicPr/>
+                <p:nvPr/>
+              </p:nvPicPr>
+              <p:blipFill>
+                <a:blip r:embed="rId6"/>
+                <a:stretch/>
+              </p:blipFill>
+              <p:spPr>
+                <a:xfrm>
+                  <a:off x="9814320" y="536400"/>
+                  <a:ext cx="200880" cy="296280"/>
+                </a:xfrm>
+                <a:prstGeom prst="rect">
+                  <a:avLst/>
+                </a:prstGeom>
+                <a:noFill/>
+                <a:ln w="0">
+                  <a:noFill/>
+                </a:ln>
+              </p:spPr>
+            </p:pic>
+          </p:grpSp>
+        </p:grpSp>
+        <p:pic>
+          <p:nvPicPr>
+            <p:cNvPr id="49" name="Picture 31">
+              <a:extLst>
+                <a:ext uri="{FF2B5EF4-FFF2-40B4-BE49-F238E27FC236}">
+                  <a16:creationId xmlns:a16="http://schemas.microsoft.com/office/drawing/2014/main" id="{C6CD5E8C-8B18-F837-4907-BE7847F69F21}"/>
+                </a:ext>
+              </a:extLst>
+            </p:cNvPr>
+            <p:cNvPicPr/>
+            <p:nvPr/>
+          </p:nvPicPr>
+          <p:blipFill>
+            <a:blip r:embed="rId7"/>
+            <a:stretch/>
+          </p:blipFill>
+          <p:spPr>
+            <a:xfrm>
+              <a:off x="8424360" y="119520"/>
+              <a:ext cx="736200" cy="748800"/>
+            </a:xfrm>
+            <a:prstGeom prst="rect">
+              <a:avLst/>
+            </a:prstGeom>
+            <a:noFill/>
+            <a:ln w="0">
+              <a:noFill/>
+            </a:ln>
+          </p:spPr>
+        </p:pic>
+      </p:grpSp>
     </p:spTree>
   </p:cSld>
   <p:clrMapOvr>
@@ -12400,6 +12766,189 @@
           </a:p>
         </p:txBody>
       </p:sp>
+      <p:grpSp>
+        <p:nvGrpSpPr>
+          <p:cNvPr id="18" name="Group 17">
+            <a:extLst>
+              <a:ext uri="{FF2B5EF4-FFF2-40B4-BE49-F238E27FC236}">
+                <a16:creationId xmlns:a16="http://schemas.microsoft.com/office/drawing/2014/main" id="{909AB598-9864-13AC-7EB6-83641F62AB6D}"/>
+              </a:ext>
+            </a:extLst>
+          </p:cNvPr>
+          <p:cNvGrpSpPr/>
+          <p:nvPr/>
+        </p:nvGrpSpPr>
+        <p:grpSpPr>
+          <a:xfrm>
+            <a:off x="8424360" y="119520"/>
+            <a:ext cx="1590840" cy="748800"/>
+            <a:chOff x="8424360" y="119520"/>
+            <a:chExt cx="1590840" cy="748800"/>
+          </a:xfrm>
+        </p:grpSpPr>
+        <p:grpSp>
+          <p:nvGrpSpPr>
+            <p:cNvPr id="19" name="Group 18">
+              <a:extLst>
+                <a:ext uri="{FF2B5EF4-FFF2-40B4-BE49-F238E27FC236}">
+                  <a16:creationId xmlns:a16="http://schemas.microsoft.com/office/drawing/2014/main" id="{F6A3897A-2CE4-8441-A3AD-FAB88C98ECB1}"/>
+                </a:ext>
+              </a:extLst>
+            </p:cNvPr>
+            <p:cNvGrpSpPr/>
+            <p:nvPr/>
+          </p:nvGrpSpPr>
+          <p:grpSpPr>
+            <a:xfrm>
+              <a:off x="9225000" y="124302"/>
+              <a:ext cx="790200" cy="708378"/>
+              <a:chOff x="9225000" y="124302"/>
+              <a:chExt cx="790200" cy="708378"/>
+            </a:xfrm>
+          </p:grpSpPr>
+          <p:pic>
+            <p:nvPicPr>
+              <p:cNvPr id="21" name="Picture 20">
+                <a:extLst>
+                  <a:ext uri="{FF2B5EF4-FFF2-40B4-BE49-F238E27FC236}">
+                    <a16:creationId xmlns:a16="http://schemas.microsoft.com/office/drawing/2014/main" id="{EF6EDCBB-3A67-FEA4-515B-8849DDEF5A7D}"/>
+                  </a:ext>
+                </a:extLst>
+              </p:cNvPr>
+              <p:cNvPicPr>
+                <a:picLocks noChangeAspect="1"/>
+              </p:cNvPicPr>
+              <p:nvPr/>
+            </p:nvPicPr>
+            <p:blipFill>
+              <a:blip r:embed="rId4"/>
+              <a:stretch>
+                <a:fillRect/>
+              </a:stretch>
+            </p:blipFill>
+            <p:spPr>
+              <a:xfrm>
+                <a:off x="9262056" y="124302"/>
+                <a:ext cx="716666" cy="424533"/>
+              </a:xfrm>
+              <a:prstGeom prst="rect">
+                <a:avLst/>
+              </a:prstGeom>
+            </p:spPr>
+          </p:pic>
+          <p:grpSp>
+            <p:nvGrpSpPr>
+              <p:cNvPr id="22" name="Group 32">
+                <a:extLst>
+                  <a:ext uri="{FF2B5EF4-FFF2-40B4-BE49-F238E27FC236}">
+                    <a16:creationId xmlns:a16="http://schemas.microsoft.com/office/drawing/2014/main" id="{6617F3C0-CB58-76F6-6D9C-4B7D33F757AF}"/>
+                  </a:ext>
+                </a:extLst>
+              </p:cNvPr>
+              <p:cNvGrpSpPr/>
+              <p:nvPr/>
+            </p:nvGrpSpPr>
+            <p:grpSpPr>
+              <a:xfrm>
+                <a:off x="9225000" y="531360"/>
+                <a:ext cx="790200" cy="301320"/>
+                <a:chOff x="9225000" y="531360"/>
+                <a:chExt cx="790200" cy="301320"/>
+              </a:xfrm>
+            </p:grpSpPr>
+            <p:pic>
+              <p:nvPicPr>
+                <p:cNvPr id="23" name="Picture 29" descr="Synchrotron SOLEIL">
+                  <a:extLst>
+                    <a:ext uri="{FF2B5EF4-FFF2-40B4-BE49-F238E27FC236}">
+                      <a16:creationId xmlns:a16="http://schemas.microsoft.com/office/drawing/2014/main" id="{3D29D530-597A-AA87-8E23-414EE6F8455D}"/>
+                    </a:ext>
+                  </a:extLst>
+                </p:cNvPr>
+                <p:cNvPicPr/>
+                <p:nvPr/>
+              </p:nvPicPr>
+              <p:blipFill>
+                <a:blip r:embed="rId5"/>
+                <a:stretch/>
+              </p:blipFill>
+              <p:spPr>
+                <a:xfrm>
+                  <a:off x="9225000" y="531360"/>
+                  <a:ext cx="547920" cy="264600"/>
+                </a:xfrm>
+                <a:prstGeom prst="rect">
+                  <a:avLst/>
+                </a:prstGeom>
+                <a:noFill/>
+                <a:ln w="0">
+                  <a:noFill/>
+                </a:ln>
+              </p:spPr>
+            </p:pic>
+            <p:pic>
+              <p:nvPicPr>
+                <p:cNvPr id="24" name="Picture 30" descr="DTU Physics">
+                  <a:extLst>
+                    <a:ext uri="{FF2B5EF4-FFF2-40B4-BE49-F238E27FC236}">
+                      <a16:creationId xmlns:a16="http://schemas.microsoft.com/office/drawing/2014/main" id="{119BA0BD-8CAA-BEFE-70E9-9D0C6BFBF9DB}"/>
+                    </a:ext>
+                  </a:extLst>
+                </p:cNvPr>
+                <p:cNvPicPr/>
+                <p:nvPr/>
+              </p:nvPicPr>
+              <p:blipFill>
+                <a:blip r:embed="rId6"/>
+                <a:stretch/>
+              </p:blipFill>
+              <p:spPr>
+                <a:xfrm>
+                  <a:off x="9814320" y="536400"/>
+                  <a:ext cx="200880" cy="296280"/>
+                </a:xfrm>
+                <a:prstGeom prst="rect">
+                  <a:avLst/>
+                </a:prstGeom>
+                <a:noFill/>
+                <a:ln w="0">
+                  <a:noFill/>
+                </a:ln>
+              </p:spPr>
+            </p:pic>
+          </p:grpSp>
+        </p:grpSp>
+        <p:pic>
+          <p:nvPicPr>
+            <p:cNvPr id="20" name="Picture 31">
+              <a:extLst>
+                <a:ext uri="{FF2B5EF4-FFF2-40B4-BE49-F238E27FC236}">
+                  <a16:creationId xmlns:a16="http://schemas.microsoft.com/office/drawing/2014/main" id="{42181C4D-86CD-E60B-06FA-10A341CCC4B0}"/>
+                </a:ext>
+              </a:extLst>
+            </p:cNvPr>
+            <p:cNvPicPr/>
+            <p:nvPr/>
+          </p:nvPicPr>
+          <p:blipFill>
+            <a:blip r:embed="rId7"/>
+            <a:stretch/>
+          </p:blipFill>
+          <p:spPr>
+            <a:xfrm>
+              <a:off x="8424360" y="119520"/>
+              <a:ext cx="736200" cy="748800"/>
+            </a:xfrm>
+            <a:prstGeom prst="rect">
+              <a:avLst/>
+            </a:prstGeom>
+            <a:noFill/>
+            <a:ln w="0">
+              <a:noFill/>
+            </a:ln>
+          </p:spPr>
+        </p:pic>
+      </p:grpSp>
     </p:spTree>
   </p:cSld>
   <p:clrMapOvr>
@@ -13629,6 +14178,189 @@
           </a:p>
         </p:txBody>
       </p:sp>
+      <p:grpSp>
+        <p:nvGrpSpPr>
+          <p:cNvPr id="11" name="Group 10">
+            <a:extLst>
+              <a:ext uri="{FF2B5EF4-FFF2-40B4-BE49-F238E27FC236}">
+                <a16:creationId xmlns:a16="http://schemas.microsoft.com/office/drawing/2014/main" id="{3A187549-E7B6-56B3-34FF-9DDA46F20634}"/>
+              </a:ext>
+            </a:extLst>
+          </p:cNvPr>
+          <p:cNvGrpSpPr/>
+          <p:nvPr/>
+        </p:nvGrpSpPr>
+        <p:grpSpPr>
+          <a:xfrm>
+            <a:off x="8424360" y="119520"/>
+            <a:ext cx="1590840" cy="748800"/>
+            <a:chOff x="8424360" y="119520"/>
+            <a:chExt cx="1590840" cy="748800"/>
+          </a:xfrm>
+        </p:grpSpPr>
+        <p:grpSp>
+          <p:nvGrpSpPr>
+            <p:cNvPr id="12" name="Group 11">
+              <a:extLst>
+                <a:ext uri="{FF2B5EF4-FFF2-40B4-BE49-F238E27FC236}">
+                  <a16:creationId xmlns:a16="http://schemas.microsoft.com/office/drawing/2014/main" id="{80BEA65F-FFE7-C956-B1EE-E9ABFA95E60D}"/>
+                </a:ext>
+              </a:extLst>
+            </p:cNvPr>
+            <p:cNvGrpSpPr/>
+            <p:nvPr/>
+          </p:nvGrpSpPr>
+          <p:grpSpPr>
+            <a:xfrm>
+              <a:off x="9225000" y="124302"/>
+              <a:ext cx="790200" cy="708378"/>
+              <a:chOff x="9225000" y="124302"/>
+              <a:chExt cx="790200" cy="708378"/>
+            </a:xfrm>
+          </p:grpSpPr>
+          <p:pic>
+            <p:nvPicPr>
+              <p:cNvPr id="14" name="Picture 13">
+                <a:extLst>
+                  <a:ext uri="{FF2B5EF4-FFF2-40B4-BE49-F238E27FC236}">
+                    <a16:creationId xmlns:a16="http://schemas.microsoft.com/office/drawing/2014/main" id="{3B82247B-138D-C5D8-857D-206966767A9C}"/>
+                  </a:ext>
+                </a:extLst>
+              </p:cNvPr>
+              <p:cNvPicPr>
+                <a:picLocks noChangeAspect="1"/>
+              </p:cNvPicPr>
+              <p:nvPr/>
+            </p:nvPicPr>
+            <p:blipFill>
+              <a:blip r:embed="rId4"/>
+              <a:stretch>
+                <a:fillRect/>
+              </a:stretch>
+            </p:blipFill>
+            <p:spPr>
+              <a:xfrm>
+                <a:off x="9262056" y="124302"/>
+                <a:ext cx="716666" cy="424533"/>
+              </a:xfrm>
+              <a:prstGeom prst="rect">
+                <a:avLst/>
+              </a:prstGeom>
+            </p:spPr>
+          </p:pic>
+          <p:grpSp>
+            <p:nvGrpSpPr>
+              <p:cNvPr id="15" name="Group 32">
+                <a:extLst>
+                  <a:ext uri="{FF2B5EF4-FFF2-40B4-BE49-F238E27FC236}">
+                    <a16:creationId xmlns:a16="http://schemas.microsoft.com/office/drawing/2014/main" id="{2BA2688E-798E-FF30-B826-BA9D3A7376E8}"/>
+                  </a:ext>
+                </a:extLst>
+              </p:cNvPr>
+              <p:cNvGrpSpPr/>
+              <p:nvPr/>
+            </p:nvGrpSpPr>
+            <p:grpSpPr>
+              <a:xfrm>
+                <a:off x="9225000" y="531360"/>
+                <a:ext cx="790200" cy="301320"/>
+                <a:chOff x="9225000" y="531360"/>
+                <a:chExt cx="790200" cy="301320"/>
+              </a:xfrm>
+            </p:grpSpPr>
+            <p:pic>
+              <p:nvPicPr>
+                <p:cNvPr id="16" name="Picture 29" descr="Synchrotron SOLEIL">
+                  <a:extLst>
+                    <a:ext uri="{FF2B5EF4-FFF2-40B4-BE49-F238E27FC236}">
+                      <a16:creationId xmlns:a16="http://schemas.microsoft.com/office/drawing/2014/main" id="{BC1FC595-E5C4-8A88-197B-EEC1FA1D7541}"/>
+                    </a:ext>
+                  </a:extLst>
+                </p:cNvPr>
+                <p:cNvPicPr/>
+                <p:nvPr/>
+              </p:nvPicPr>
+              <p:blipFill>
+                <a:blip r:embed="rId5"/>
+                <a:stretch/>
+              </p:blipFill>
+              <p:spPr>
+                <a:xfrm>
+                  <a:off x="9225000" y="531360"/>
+                  <a:ext cx="547920" cy="264600"/>
+                </a:xfrm>
+                <a:prstGeom prst="rect">
+                  <a:avLst/>
+                </a:prstGeom>
+                <a:noFill/>
+                <a:ln w="0">
+                  <a:noFill/>
+                </a:ln>
+              </p:spPr>
+            </p:pic>
+            <p:pic>
+              <p:nvPicPr>
+                <p:cNvPr id="17" name="Picture 30" descr="DTU Physics">
+                  <a:extLst>
+                    <a:ext uri="{FF2B5EF4-FFF2-40B4-BE49-F238E27FC236}">
+                      <a16:creationId xmlns:a16="http://schemas.microsoft.com/office/drawing/2014/main" id="{B891E5B0-8E16-568C-DC2D-CC2C54D5E7C8}"/>
+                    </a:ext>
+                  </a:extLst>
+                </p:cNvPr>
+                <p:cNvPicPr/>
+                <p:nvPr/>
+              </p:nvPicPr>
+              <p:blipFill>
+                <a:blip r:embed="rId6"/>
+                <a:stretch/>
+              </p:blipFill>
+              <p:spPr>
+                <a:xfrm>
+                  <a:off x="9814320" y="536400"/>
+                  <a:ext cx="200880" cy="296280"/>
+                </a:xfrm>
+                <a:prstGeom prst="rect">
+                  <a:avLst/>
+                </a:prstGeom>
+                <a:noFill/>
+                <a:ln w="0">
+                  <a:noFill/>
+                </a:ln>
+              </p:spPr>
+            </p:pic>
+          </p:grpSp>
+        </p:grpSp>
+        <p:pic>
+          <p:nvPicPr>
+            <p:cNvPr id="13" name="Picture 31">
+              <a:extLst>
+                <a:ext uri="{FF2B5EF4-FFF2-40B4-BE49-F238E27FC236}">
+                  <a16:creationId xmlns:a16="http://schemas.microsoft.com/office/drawing/2014/main" id="{F88A8012-FAAB-7AB5-2989-A3A4084694CD}"/>
+                </a:ext>
+              </a:extLst>
+            </p:cNvPr>
+            <p:cNvPicPr/>
+            <p:nvPr/>
+          </p:nvPicPr>
+          <p:blipFill>
+            <a:blip r:embed="rId7"/>
+            <a:stretch/>
+          </p:blipFill>
+          <p:spPr>
+            <a:xfrm>
+              <a:off x="8424360" y="119520"/>
+              <a:ext cx="736200" cy="748800"/>
+            </a:xfrm>
+            <a:prstGeom prst="rect">
+              <a:avLst/>
+            </a:prstGeom>
+            <a:noFill/>
+            <a:ln w="0">
+              <a:noFill/>
+            </a:ln>
+          </p:spPr>
+        </p:pic>
+      </p:grpSp>
     </p:spTree>
   </p:cSld>
   <p:clrMapOvr>
@@ -16378,6 +17110,189 @@
           </a:p>
         </p:txBody>
       </p:sp>
+      <p:grpSp>
+        <p:nvGrpSpPr>
+          <p:cNvPr id="27" name="Group 26">
+            <a:extLst>
+              <a:ext uri="{FF2B5EF4-FFF2-40B4-BE49-F238E27FC236}">
+                <a16:creationId xmlns:a16="http://schemas.microsoft.com/office/drawing/2014/main" id="{A4FF8A17-EE93-7C95-58A4-FFF1B734F37D}"/>
+              </a:ext>
+            </a:extLst>
+          </p:cNvPr>
+          <p:cNvGrpSpPr/>
+          <p:nvPr/>
+        </p:nvGrpSpPr>
+        <p:grpSpPr>
+          <a:xfrm>
+            <a:off x="8424360" y="119520"/>
+            <a:ext cx="1590840" cy="748800"/>
+            <a:chOff x="8424360" y="119520"/>
+            <a:chExt cx="1590840" cy="748800"/>
+          </a:xfrm>
+        </p:grpSpPr>
+        <p:grpSp>
+          <p:nvGrpSpPr>
+            <p:cNvPr id="28" name="Group 27">
+              <a:extLst>
+                <a:ext uri="{FF2B5EF4-FFF2-40B4-BE49-F238E27FC236}">
+                  <a16:creationId xmlns:a16="http://schemas.microsoft.com/office/drawing/2014/main" id="{ADCBD53A-DAA3-9AE7-01D9-30B0F9744874}"/>
+                </a:ext>
+              </a:extLst>
+            </p:cNvPr>
+            <p:cNvGrpSpPr/>
+            <p:nvPr/>
+          </p:nvGrpSpPr>
+          <p:grpSpPr>
+            <a:xfrm>
+              <a:off x="9225000" y="124302"/>
+              <a:ext cx="790200" cy="708378"/>
+              <a:chOff x="9225000" y="124302"/>
+              <a:chExt cx="790200" cy="708378"/>
+            </a:xfrm>
+          </p:grpSpPr>
+          <p:pic>
+            <p:nvPicPr>
+              <p:cNvPr id="30" name="Picture 29">
+                <a:extLst>
+                  <a:ext uri="{FF2B5EF4-FFF2-40B4-BE49-F238E27FC236}">
+                    <a16:creationId xmlns:a16="http://schemas.microsoft.com/office/drawing/2014/main" id="{CA976047-8CC0-6A62-1D2C-2CFC52141888}"/>
+                  </a:ext>
+                </a:extLst>
+              </p:cNvPr>
+              <p:cNvPicPr>
+                <a:picLocks noChangeAspect="1"/>
+              </p:cNvPicPr>
+              <p:nvPr/>
+            </p:nvPicPr>
+            <p:blipFill>
+              <a:blip r:embed="rId4"/>
+              <a:stretch>
+                <a:fillRect/>
+              </a:stretch>
+            </p:blipFill>
+            <p:spPr>
+              <a:xfrm>
+                <a:off x="9262056" y="124302"/>
+                <a:ext cx="716666" cy="424533"/>
+              </a:xfrm>
+              <a:prstGeom prst="rect">
+                <a:avLst/>
+              </a:prstGeom>
+            </p:spPr>
+          </p:pic>
+          <p:grpSp>
+            <p:nvGrpSpPr>
+              <p:cNvPr id="31" name="Group 32">
+                <a:extLst>
+                  <a:ext uri="{FF2B5EF4-FFF2-40B4-BE49-F238E27FC236}">
+                    <a16:creationId xmlns:a16="http://schemas.microsoft.com/office/drawing/2014/main" id="{77461B80-3120-ADE1-6CA9-F37E66DB0E95}"/>
+                  </a:ext>
+                </a:extLst>
+              </p:cNvPr>
+              <p:cNvGrpSpPr/>
+              <p:nvPr/>
+            </p:nvGrpSpPr>
+            <p:grpSpPr>
+              <a:xfrm>
+                <a:off x="9225000" y="531360"/>
+                <a:ext cx="790200" cy="301320"/>
+                <a:chOff x="9225000" y="531360"/>
+                <a:chExt cx="790200" cy="301320"/>
+              </a:xfrm>
+            </p:grpSpPr>
+            <p:pic>
+              <p:nvPicPr>
+                <p:cNvPr id="32" name="Picture 29" descr="Synchrotron SOLEIL">
+                  <a:extLst>
+                    <a:ext uri="{FF2B5EF4-FFF2-40B4-BE49-F238E27FC236}">
+                      <a16:creationId xmlns:a16="http://schemas.microsoft.com/office/drawing/2014/main" id="{FD49680B-DFCF-8992-32B7-095432D39861}"/>
+                    </a:ext>
+                  </a:extLst>
+                </p:cNvPr>
+                <p:cNvPicPr/>
+                <p:nvPr/>
+              </p:nvPicPr>
+              <p:blipFill>
+                <a:blip r:embed="rId5"/>
+                <a:stretch/>
+              </p:blipFill>
+              <p:spPr>
+                <a:xfrm>
+                  <a:off x="9225000" y="531360"/>
+                  <a:ext cx="547920" cy="264600"/>
+                </a:xfrm>
+                <a:prstGeom prst="rect">
+                  <a:avLst/>
+                </a:prstGeom>
+                <a:noFill/>
+                <a:ln w="0">
+                  <a:noFill/>
+                </a:ln>
+              </p:spPr>
+            </p:pic>
+            <p:pic>
+              <p:nvPicPr>
+                <p:cNvPr id="33" name="Picture 30" descr="DTU Physics">
+                  <a:extLst>
+                    <a:ext uri="{FF2B5EF4-FFF2-40B4-BE49-F238E27FC236}">
+                      <a16:creationId xmlns:a16="http://schemas.microsoft.com/office/drawing/2014/main" id="{E7EB76D4-AE5D-D694-5668-77B3589929BE}"/>
+                    </a:ext>
+                  </a:extLst>
+                </p:cNvPr>
+                <p:cNvPicPr/>
+                <p:nvPr/>
+              </p:nvPicPr>
+              <p:blipFill>
+                <a:blip r:embed="rId6"/>
+                <a:stretch/>
+              </p:blipFill>
+              <p:spPr>
+                <a:xfrm>
+                  <a:off x="9814320" y="536400"/>
+                  <a:ext cx="200880" cy="296280"/>
+                </a:xfrm>
+                <a:prstGeom prst="rect">
+                  <a:avLst/>
+                </a:prstGeom>
+                <a:noFill/>
+                <a:ln w="0">
+                  <a:noFill/>
+                </a:ln>
+              </p:spPr>
+            </p:pic>
+          </p:grpSp>
+        </p:grpSp>
+        <p:pic>
+          <p:nvPicPr>
+            <p:cNvPr id="29" name="Picture 31">
+              <a:extLst>
+                <a:ext uri="{FF2B5EF4-FFF2-40B4-BE49-F238E27FC236}">
+                  <a16:creationId xmlns:a16="http://schemas.microsoft.com/office/drawing/2014/main" id="{A18154F2-F4DD-66B8-E94B-079C88C37925}"/>
+                </a:ext>
+              </a:extLst>
+            </p:cNvPr>
+            <p:cNvPicPr/>
+            <p:nvPr/>
+          </p:nvPicPr>
+          <p:blipFill>
+            <a:blip r:embed="rId7"/>
+            <a:stretch/>
+          </p:blipFill>
+          <p:spPr>
+            <a:xfrm>
+              <a:off x="8424360" y="119520"/>
+              <a:ext cx="736200" cy="748800"/>
+            </a:xfrm>
+            <a:prstGeom prst="rect">
+              <a:avLst/>
+            </a:prstGeom>
+            <a:noFill/>
+            <a:ln w="0">
+              <a:noFill/>
+            </a:ln>
+          </p:spPr>
+        </p:pic>
+      </p:grpSp>
     </p:spTree>
   </p:cSld>
   <p:clrMapOvr>
@@ -17665,7 +18580,7 @@
             </a:ln>
             <a:extLst>
               <a:ext uri="{C572A759-6A51-4108-AA02-DFA0A04FC94B}">
-                <ma14:wrappingTextBoxFlag xmlns="" xmlns:m="http://schemas.openxmlformats.org/officeDocument/2006/math" xmlns:a14="http://schemas.microsoft.com/office/drawing/2010/main" xmlns:ma14="http://schemas.microsoft.com/office/mac/drawingml/2011/main" val="1"/>
+                <ma14:wrappingTextBoxFlag xmlns:ma14="http://schemas.microsoft.com/office/mac/drawingml/2011/main" xmlns:a14="http://schemas.microsoft.com/office/drawing/2010/main" xmlns:m="http://schemas.openxmlformats.org/officeDocument/2006/math" xmlns="" val="1"/>
               </a:ext>
             </a:extLst>
           </p:spPr>
